--- a/KyoBooks/docs/bestsellers_presentation.pptx
+++ b/KyoBooks/docs/bestsellers_presentation.pptx
@@ -791,7 +791,7 @@
           <a:lstStyle/>
           <a:p>
             <a:r>
-              <a:t>도서 시장의 거시적 현황을 진단하기 위해 산출한 4대 핵심 요약 지표입니다. 분석 대상은 50권이며, 평균 정가는 약 17,932원 선으로 책정되어 있으며, 실제 독자들이 지출하는 평균 가격은 16,193원 수준입니다. 또한, 총 리뷰 건수가 무려 13,511건에 도달한 점을 볼 때, 베스트셀러를 소비하는 독자층의 피드백과 커뮤니티 참여도가 매우 활발하다는 점을 입증하고 있습니다.</a:t>
+              <a:t>도서 시장의 거시적 현황을 진단하기 위해 산출한 4대 핵심 요약 지표입니다. 분석 대상은 50권이며, 평균 정가는 약 18,052원 선으로 책정되어 있으며, 실제 독자들이 지출하는 평균 가격은 16,284원 수준입니다. 또한, 총 리뷰 건수가 무려 31,777건에 도달한 점을 볼 때, 베스트셀러를 소비하는 독자층의 피드백과 커뮤니티 참여도가 매우 활발하다는 점을 입증하고 있습니다.</a:t>
             </a:r>
           </a:p>
         </p:txBody>
@@ -5248,7 +5248,7 @@
                 </a:solidFill>
                 <a:latin typeface="Malgun Gothic"/>
               </a:rPr>
-              <a:t>50 권</a:t>
+              <a:t>99 권</a:t>
             </a:r>
           </a:p>
           <a:p>
@@ -5351,7 +5351,7 @@
                 </a:solidFill>
                 <a:latin typeface="Malgun Gothic"/>
               </a:rPr>
-              <a:t>17,932 원</a:t>
+              <a:t>18,052 원</a:t>
             </a:r>
           </a:p>
           <a:p>
@@ -5454,7 +5454,7 @@
                 </a:solidFill>
                 <a:latin typeface="Malgun Gothic"/>
               </a:rPr>
-              <a:t>16,193 원</a:t>
+              <a:t>16,284 원</a:t>
             </a:r>
           </a:p>
           <a:p>
@@ -5557,7 +5557,7 @@
                 </a:solidFill>
                 <a:latin typeface="Malgun Gothic"/>
               </a:rPr>
-              <a:t>13,511 건</a:t>
+              <a:t>31,777 건</a:t>
             </a:r>
           </a:p>
           <a:p>
@@ -5721,15 +5721,15 @@
                 </a:solidFill>
                 <a:latin typeface="Malgun Gothic"/>
               </a:rPr>
-              <a:t>• **상위 1위 출판사**: 두산매거진</a:t>
+              <a:t>• **상위 1위 출판사**: 한국교육방송공사(EBSi)</a:t>
             </a:r>
             <a:br/>
             <a:r>
-              <a:t>• **상위 2위 출판사**: 생각의길</a:t>
+              <a:t>• **상위 2위 출판사**: 민음사</a:t>
             </a:r>
             <a:br/>
             <a:r>
-              <a:t>• **상위 3위 출판사**: 비상교육</a:t>
+              <a:t>• **상위 3위 출판사**: 이투스북</a:t>
             </a:r>
             <a:br/>
             <a:br/>
